--- a/classes/parte-5-explotacion-de-sistemas-y-binarios/138-desarrollo-de-exploits-moderno/clase-138-presentacion.pptx
+++ b/classes/parte-5-explotacion-de-sistemas-y-binarios/138-desarrollo-de-exploits-moderno/clase-138-presentacion.pptx
@@ -17,6 +17,8 @@
     <p:sldId id="265" r:id="rId16"/>
     <p:sldId id="266" r:id="rId17"/>
     <p:sldId id="267" r:id="rId18"/>
+    <p:sldId id="268" r:id="rId19"/>
+    <p:sldId id="269" r:id="rId20"/>
   </p:sldIdLst>
   <p:sldSz cx="9144000" cy="6858000" type="screen4x3"/>
   <p:notesSz cx="6858000" cy="9144000"/>
@@ -3198,7 +3200,7 @@
                   <a:srgbClr val="0B3D2E"/>
                 </a:solidFill>
               </a:rPr>
-              <a:t>⚠️ Errores comunes</a:t>
+              <a:t>📝 Reto verificable</a:t>
             </a:r>
           </a:p>
         </p:txBody>
@@ -3236,67 +3238,52 @@
                   <a:srgbClr val="22282E"/>
                 </a:solidFill>
               </a:rPr>
-              <a:t>•  Base de libc incorrecta — libc equivocada; identifícala con el leak</a:t>
-            </a:r>
-          </a:p>
-          <a:p>
-            <a:pPr>
-              <a:spcAft>
-                <a:spcPts val="600"/>
-              </a:spcAft>
-            </a:pPr>
-            <a:r>
-              <a:rPr sz="1500">
-                <a:solidFill>
-                  <a:srgbClr val="22282E"/>
-                </a:solidFill>
-              </a:rPr>
-              <a:t>•  Funciona local, no remoto — Diferencias de libc/entorno; usa la del servidor</a:t>
-            </a:r>
-          </a:p>
-          <a:p>
-            <a:pPr>
-              <a:spcAft>
-                <a:spcPts val="600"/>
-              </a:spcAft>
-            </a:pPr>
-            <a:r>
-              <a:rPr sz="1500">
-                <a:solidFill>
-                  <a:srgbClr val="22282E"/>
-                </a:solidFill>
-              </a:rPr>
-              <a:t>•  Crash intermitente — Badchars o alineación; revisa el payload</a:t>
-            </a:r>
-          </a:p>
-          <a:p>
-            <a:pPr>
-              <a:spcAft>
-                <a:spcPts val="600"/>
-              </a:spcAft>
-            </a:pPr>
-            <a:r>
-              <a:rPr sz="1500">
-                <a:solidFill>
-                  <a:srgbClr val="22282E"/>
-                </a:solidFill>
-              </a:rPr>
-              <a:t>•  onegadget no da shell — No se cumplen sus constraints; prueba otro</a:t>
-            </a:r>
-          </a:p>
-          <a:p>
-            <a:pPr>
-              <a:spcAft>
-                <a:spcPts val="600"/>
-              </a:spcAft>
-            </a:pPr>
-            <a:r>
-              <a:rPr sz="1500">
-                <a:solidFill>
-                  <a:srgbClr val="22282E"/>
-                </a:solidFill>
-              </a:rPr>
-              <a:t>•  Leak desalineado — Falta ljust(8,\x00) o offset del leak erróneo</a:t>
+              <a:t>•  Desarrolla un exploit completo contra un binario de laboratorio con NX+ASLR (y PIE si te atreves) que</a:t>
+            </a:r>
+          </a:p>
+          <a:p>
+            <a:pPr>
+              <a:spcAft>
+                <a:spcPts val="600"/>
+              </a:spcAft>
+            </a:pPr>
+            <a:r>
+              <a:rPr sz="1500">
+                <a:solidFill>
+                  <a:srgbClr val="22282E"/>
+                </a:solidFill>
+              </a:rPr>
+              <a:t>•  obtenga shell filtrando la base de libc en runtime.</a:t>
+            </a:r>
+          </a:p>
+          <a:p>
+            <a:pPr>
+              <a:spcAft>
+                <a:spcPts val="600"/>
+              </a:spcAft>
+            </a:pPr>
+            <a:r>
+              <a:rPr sz="1500">
+                <a:solidFill>
+                  <a:srgbClr val="22282E"/>
+                </a:solidFill>
+              </a:rPr>
+              <a:t>•  Criterio de aceptación: ./exploit.py da shell interactiva de forma fiable (≥ 8/10 corridas) con</a:t>
+            </a:r>
+          </a:p>
+          <a:p>
+            <a:pPr>
+              <a:spcAft>
+                <a:spcPts val="600"/>
+              </a:spcAft>
+            </a:pPr>
+            <a:r>
+              <a:rPr sz="1500">
+                <a:solidFill>
+                  <a:srgbClr val="22282E"/>
+                </a:solidFill>
+              </a:rPr>
+              <a:t>•  ASLR activado, calculando la base dinámicamente.</a:t>
             </a:r>
           </a:p>
         </p:txBody>
@@ -3347,7 +3334,7 @@
                   <a:srgbClr val="0B3D2E"/>
                 </a:solidFill>
               </a:rPr>
-              <a:t>❓ Preguntas frecuentes</a:t>
+              <a:t>⚠️ Errores comunes</a:t>
             </a:r>
           </a:p>
         </p:txBody>
@@ -3385,67 +3372,67 @@
                   <a:srgbClr val="22282E"/>
                 </a:solidFill>
               </a:rPr>
-              <a:t>•  ❓ ¿Siempre necesito un leak? Con ASLR/PIE, casi siempre. Sin leak, técnicas como ret2dlresolve o</a:t>
-            </a:r>
-          </a:p>
-          <a:p>
-            <a:pPr>
-              <a:spcAft>
-                <a:spcPts val="600"/>
-              </a:spcAft>
-            </a:pPr>
-            <a:r>
-              <a:rPr sz="1500">
-                <a:solidFill>
-                  <a:srgbClr val="22282E"/>
-                </a:solidFill>
-              </a:rPr>
-              <a:t>•  partial overwrite pueden ayudar.</a:t>
-            </a:r>
-          </a:p>
-          <a:p>
-            <a:pPr>
-              <a:spcAft>
-                <a:spcPts val="600"/>
-              </a:spcAft>
-            </a:pPr>
-            <a:r>
-              <a:rPr sz="1500">
-                <a:solidFill>
-                  <a:srgbClr val="22282E"/>
-                </a:solidFill>
-              </a:rPr>
-              <a:t>•  ❓ ¿Cómo sé qué libc usa el reto? Por un leak + libc-database, o porque el reto la proporciona.</a:t>
-            </a:r>
-          </a:p>
-          <a:p>
-            <a:pPr>
-              <a:spcAft>
-                <a:spcPts val="600"/>
-              </a:spcAft>
-            </a:pPr>
-            <a:r>
-              <a:rPr sz="1500">
-                <a:solidFill>
-                  <a:srgbClr val="22282E"/>
-                </a:solidFill>
-              </a:rPr>
-              <a:t>•  ❓ ¿Un exploit debe ser 100% fiable? Apunta a la máxima fiabilidad; en CTF basta con que funcione</a:t>
-            </a:r>
-          </a:p>
-          <a:p>
-            <a:pPr>
-              <a:spcAft>
-                <a:spcPts val="600"/>
-              </a:spcAft>
-            </a:pPr>
-            <a:r>
-              <a:rPr sz="1500">
-                <a:solidFill>
-                  <a:srgbClr val="22282E"/>
-                </a:solidFill>
-              </a:rPr>
-              <a:t>•  consistentemente contra el servidor.</a:t>
+              <a:t>•  Base de libc incorrecta — libc equivocada; identifícala con el leak</a:t>
+            </a:r>
+          </a:p>
+          <a:p>
+            <a:pPr>
+              <a:spcAft>
+                <a:spcPts val="600"/>
+              </a:spcAft>
+            </a:pPr>
+            <a:r>
+              <a:rPr sz="1500">
+                <a:solidFill>
+                  <a:srgbClr val="22282E"/>
+                </a:solidFill>
+              </a:rPr>
+              <a:t>•  Funciona local, no remoto — Diferencias de libc/entorno; usa la del servidor</a:t>
+            </a:r>
+          </a:p>
+          <a:p>
+            <a:pPr>
+              <a:spcAft>
+                <a:spcPts val="600"/>
+              </a:spcAft>
+            </a:pPr>
+            <a:r>
+              <a:rPr sz="1500">
+                <a:solidFill>
+                  <a:srgbClr val="22282E"/>
+                </a:solidFill>
+              </a:rPr>
+              <a:t>•  Crash intermitente — Badchars o alineación; revisa el payload</a:t>
+            </a:r>
+          </a:p>
+          <a:p>
+            <a:pPr>
+              <a:spcAft>
+                <a:spcPts val="600"/>
+              </a:spcAft>
+            </a:pPr>
+            <a:r>
+              <a:rPr sz="1500">
+                <a:solidFill>
+                  <a:srgbClr val="22282E"/>
+                </a:solidFill>
+              </a:rPr>
+              <a:t>•  onegadget no da shell — No se cumplen sus constraints; prueba otro</a:t>
+            </a:r>
+          </a:p>
+          <a:p>
+            <a:pPr>
+              <a:spcAft>
+                <a:spcPts val="600"/>
+              </a:spcAft>
+            </a:pPr>
+            <a:r>
+              <a:rPr sz="1500">
+                <a:solidFill>
+                  <a:srgbClr val="22282E"/>
+                </a:solidFill>
+              </a:rPr>
+              <a:t>•  Leak desalineado — Falta ljust(8,\x00) o offset del leak erróneo</a:t>
             </a:r>
           </a:p>
         </p:txBody>
@@ -3496,7 +3483,7 @@
                   <a:srgbClr val="0B3D2E"/>
                 </a:solidFill>
               </a:rPr>
-              <a:t>🔗 Referencias</a:t>
+              <a:t>❓ Preguntas frecuentes</a:t>
             </a:r>
           </a:p>
         </p:txBody>
@@ -3534,6 +3521,155 @@
                   <a:srgbClr val="22282E"/>
                 </a:solidFill>
               </a:rPr>
+              <a:t>•  ❓ ¿Siempre necesito un leak? Con ASLR/PIE, casi siempre. Sin leak, técnicas como ret2dlresolve o</a:t>
+            </a:r>
+          </a:p>
+          <a:p>
+            <a:pPr>
+              <a:spcAft>
+                <a:spcPts val="600"/>
+              </a:spcAft>
+            </a:pPr>
+            <a:r>
+              <a:rPr sz="1500">
+                <a:solidFill>
+                  <a:srgbClr val="22282E"/>
+                </a:solidFill>
+              </a:rPr>
+              <a:t>•  partial overwrite pueden ayudar.</a:t>
+            </a:r>
+          </a:p>
+          <a:p>
+            <a:pPr>
+              <a:spcAft>
+                <a:spcPts val="600"/>
+              </a:spcAft>
+            </a:pPr>
+            <a:r>
+              <a:rPr sz="1500">
+                <a:solidFill>
+                  <a:srgbClr val="22282E"/>
+                </a:solidFill>
+              </a:rPr>
+              <a:t>•  ❓ ¿Cómo sé qué libc usa el reto? Por un leak + libc-database, o porque el reto la proporciona.</a:t>
+            </a:r>
+          </a:p>
+          <a:p>
+            <a:pPr>
+              <a:spcAft>
+                <a:spcPts val="600"/>
+              </a:spcAft>
+            </a:pPr>
+            <a:r>
+              <a:rPr sz="1500">
+                <a:solidFill>
+                  <a:srgbClr val="22282E"/>
+                </a:solidFill>
+              </a:rPr>
+              <a:t>•  ❓ ¿Un exploit debe ser 100% fiable? Apunta a la máxima fiabilidad; en CTF basta con que funcione</a:t>
+            </a:r>
+          </a:p>
+          <a:p>
+            <a:pPr>
+              <a:spcAft>
+                <a:spcPts val="600"/>
+              </a:spcAft>
+            </a:pPr>
+            <a:r>
+              <a:rPr sz="1500">
+                <a:solidFill>
+                  <a:srgbClr val="22282E"/>
+                </a:solidFill>
+              </a:rPr>
+              <a:t>•  consistentemente contra el servidor.</a:t>
+            </a:r>
+          </a:p>
+        </p:txBody>
+      </p:sp>
+    </p:spTree>
+  </p:cSld>
+  <p:clrMapOvr>
+    <a:masterClrMapping/>
+  </p:clrMapOvr>
+</p:sld>
+</file>
+
+<file path=ppt/slides/slide13.xml><?xml version="1.0" encoding="utf-8"?>
+<p:sld xmlns:a="http://schemas.openxmlformats.org/drawingml/2006/main" xmlns:p="http://schemas.openxmlformats.org/presentationml/2006/main" xmlns:r="http://schemas.openxmlformats.org/officeDocument/2006/relationships">
+  <p:cSld>
+    <p:spTree>
+      <p:nvGrpSpPr>
+        <p:cNvPr id="1" name=""/>
+        <p:cNvGrpSpPr/>
+        <p:nvPr/>
+      </p:nvGrpSpPr>
+      <p:grpSpPr/>
+      <p:sp>
+        <p:nvSpPr>
+          <p:cNvPr id="2" name="TextBox 1"/>
+          <p:cNvSpPr txBox="1"/>
+          <p:nvPr/>
+        </p:nvSpPr>
+        <p:spPr>
+          <a:xfrm>
+            <a:off x="457200" y="320040"/>
+            <a:ext cx="8229600" cy="822960"/>
+          </a:xfrm>
+          <a:prstGeom prst="rect">
+            <a:avLst/>
+          </a:prstGeom>
+          <a:noFill/>
+        </p:spPr>
+        <p:txBody>
+          <a:bodyPr wrap="square">
+            <a:spAutoFit/>
+          </a:bodyPr>
+          <a:lstStyle/>
+          <a:p>
+            <a:r>
+              <a:rPr sz="2600" b="1">
+                <a:solidFill>
+                  <a:srgbClr val="0B3D2E"/>
+                </a:solidFill>
+              </a:rPr>
+              <a:t>🔗 Referencias</a:t>
+            </a:r>
+          </a:p>
+        </p:txBody>
+      </p:sp>
+      <p:sp>
+        <p:nvSpPr>
+          <p:cNvPr id="3" name="TextBox 2"/>
+          <p:cNvSpPr txBox="1"/>
+          <p:nvPr/>
+        </p:nvSpPr>
+        <p:spPr>
+          <a:xfrm>
+            <a:off x="457200" y="1280160"/>
+            <a:ext cx="8229600" cy="4937760"/>
+          </a:xfrm>
+          <a:prstGeom prst="rect">
+            <a:avLst/>
+          </a:prstGeom>
+          <a:noFill/>
+        </p:spPr>
+        <p:txBody>
+          <a:bodyPr wrap="square">
+            <a:spAutoFit/>
+          </a:bodyPr>
+          <a:lstStyle/>
+          <a:p>
+            <a:pPr>
+              <a:spcAft>
+                <a:spcPts val="600"/>
+              </a:spcAft>
+            </a:pPr>
+            <a:r>
+              <a:rPr sz="1500">
+                <a:solidFill>
+                  <a:srgbClr val="22282E"/>
+                </a:solidFill>
+              </a:rPr>
               <a:t>•  pwntools — &lt;https://docs.pwntools.com/&gt;</a:t>
             </a:r>
           </a:p>
@@ -3584,6 +3720,81 @@
           </a:p>
         </p:txBody>
       </p:sp>
+    </p:spTree>
+  </p:cSld>
+  <p:clrMapOvr>
+    <a:masterClrMapping/>
+  </p:clrMapOvr>
+</p:sld>
+</file>
+
+<file path=ppt/slides/slide14.xml><?xml version="1.0" encoding="utf-8"?>
+<p:sld xmlns:a="http://schemas.openxmlformats.org/drawingml/2006/main" xmlns:p="http://schemas.openxmlformats.org/presentationml/2006/main" xmlns:r="http://schemas.openxmlformats.org/officeDocument/2006/relationships">
+  <p:cSld>
+    <p:spTree>
+      <p:nvGrpSpPr>
+        <p:cNvPr id="1" name=""/>
+        <p:cNvGrpSpPr/>
+        <p:nvPr/>
+      </p:nvGrpSpPr>
+      <p:grpSpPr/>
+      <p:sp>
+        <p:nvSpPr>
+          <p:cNvPr id="2" name="TextBox 1"/>
+          <p:cNvSpPr txBox="1"/>
+          <p:nvPr/>
+        </p:nvSpPr>
+        <p:spPr>
+          <a:xfrm>
+            <a:off x="457200" y="274320"/>
+            <a:ext cx="8229600" cy="640080"/>
+          </a:xfrm>
+          <a:prstGeom prst="rect">
+            <a:avLst/>
+          </a:prstGeom>
+          <a:noFill/>
+        </p:spPr>
+        <p:txBody>
+          <a:bodyPr wrap="square">
+            <a:spAutoFit/>
+          </a:bodyPr>
+          <a:lstStyle/>
+          <a:p>
+            <a:r>
+              <a:rPr sz="2200" b="1">
+                <a:solidFill>
+                  <a:srgbClr val="0B3D2E"/>
+                </a:solidFill>
+              </a:rPr>
+              <a:t>Diagrama de la clase</a:t>
+            </a:r>
+          </a:p>
+        </p:txBody>
+      </p:sp>
+      <p:pic>
+        <p:nvPicPr>
+          <p:cNvPr id="3" name="Picture 2" descr="3a33a570fcbc40a5.png"/>
+          <p:cNvPicPr>
+            <a:picLocks noChangeAspect="1"/>
+          </p:cNvPicPr>
+          <p:nvPr/>
+        </p:nvPicPr>
+        <p:blipFill>
+          <a:blip r:embed="rId2"/>
+          <a:stretch>
+            <a:fillRect/>
+          </a:stretch>
+        </p:blipFill>
+        <p:spPr>
+          <a:xfrm>
+            <a:off x="457200" y="3497580"/>
+            <a:ext cx="8229600" cy="502920"/>
+          </a:xfrm>
+          <a:prstGeom prst="rect">
+            <a:avLst/>
+          </a:prstGeom>
+        </p:spPr>
+      </p:pic>
     </p:spTree>
   </p:cSld>
   <p:clrMapOvr>
@@ -4107,7 +4318,7 @@
                   <a:srgbClr val="0B3D2E"/>
                 </a:solidFill>
               </a:rPr>
-              <a:t>📖 Definiciones y características</a:t>
+              <a:t>🧠 Explicación en profundidad</a:t>
             </a:r>
           </a:p>
         </p:txBody>
@@ -4145,97 +4356,97 @@
                   <a:srgbClr val="22282E"/>
                 </a:solidFill>
               </a:rPr>
-              <a:t>•  Primitiva de explotación: capacidad atómica (leer, escribir, controlar flujo). Clave: los</a:t>
-            </a:r>
-          </a:p>
-          <a:p>
-            <a:pPr>
-              <a:spcAft>
-                <a:spcPts val="600"/>
-              </a:spcAft>
-            </a:pPr>
-            <a:r>
-              <a:rPr sz="1500">
-                <a:solidFill>
-                  <a:srgbClr val="22282E"/>
-                </a:solidFill>
-              </a:rPr>
-              <a:t>•  exploits se construyen encadenando primitivas.</a:t>
-            </a:r>
-          </a:p>
-          <a:p>
-            <a:pPr>
-              <a:spcAft>
-                <a:spcPts val="600"/>
-              </a:spcAft>
-            </a:pPr>
-            <a:r>
-              <a:rPr sz="1500">
-                <a:solidFill>
-                  <a:srgbClr val="22282E"/>
-                </a:solidFill>
-              </a:rPr>
-              <a:t>•  Info leak: filtra una dirección para derrotar ASLR/PIE. Clave: imprescindible en objetivos</a:t>
-            </a:r>
-          </a:p>
-          <a:p>
-            <a:pPr>
-              <a:spcAft>
-                <a:spcPts val="600"/>
-              </a:spcAft>
-            </a:pPr>
-            <a:r>
-              <a:rPr sz="1500">
-                <a:solidFill>
-                  <a:srgbClr val="22282E"/>
-                </a:solidFill>
-              </a:rPr>
-              <a:t>•  modernos.</a:t>
-            </a:r>
-          </a:p>
-          <a:p>
-            <a:pPr>
-              <a:spcAft>
-                <a:spcPts val="600"/>
-              </a:spcAft>
-            </a:pPr>
-            <a:r>
-              <a:rPr sz="1500">
-                <a:solidFill>
-                  <a:srgbClr val="22282E"/>
-                </a:solidFill>
-              </a:rPr>
-              <a:t>•  Cálculo de base dinámico: base = leak - offset. Clave: hace el exploit robusto entre corridas.</a:t>
-            </a:r>
-          </a:p>
-          <a:p>
-            <a:pPr>
-              <a:spcAft>
-                <a:spcPts val="600"/>
-              </a:spcAft>
-            </a:pPr>
-            <a:r>
-              <a:rPr sz="1500">
-                <a:solidFill>
-                  <a:srgbClr val="22282E"/>
-                </a:solidFill>
-              </a:rPr>
-              <a:t>•  ret2dlresolve: técnica que fuerza al enlazador dinámico a resolver un símbolo (p. ej. system)</a:t>
-            </a:r>
-          </a:p>
-          <a:p>
-            <a:pPr>
-              <a:spcAft>
-                <a:spcPts val="600"/>
-              </a:spcAft>
-            </a:pPr>
-            <a:r>
-              <a:rPr sz="1500">
-                <a:solidFill>
-                  <a:srgbClr val="22282E"/>
-                </a:solidFill>
-              </a:rPr>
-              <a:t>•  sin conocer libc. Clave: útil sin leak de libc.</a:t>
+              <a:t>•  Esta clase integra todo lo anterior en la disciplina de convertir un crash en un exploit fiable</a:t>
+            </a:r>
+          </a:p>
+          <a:p>
+            <a:pPr>
+              <a:spcAft>
+                <a:spcPts val="600"/>
+              </a:spcAft>
+            </a:pPr>
+            <a:r>
+              <a:rPr sz="1500">
+                <a:solidFill>
+                  <a:srgbClr val="22282E"/>
+                </a:solidFill>
+              </a:rPr>
+              <a:t>•  contra un sistema con todas las mitigaciones activas. El cambio de mentalidad que la define es</a:t>
+            </a:r>
+          </a:p>
+          <a:p>
+            <a:pPr>
+              <a:spcAft>
+                <a:spcPts val="600"/>
+              </a:spcAft>
+            </a:pPr>
+            <a:r>
+              <a:rPr sz="1500">
+                <a:solidFill>
+                  <a:srgbClr val="22282E"/>
+                </a:solidFill>
+              </a:rPr>
+              <a:t>•  pensar por primitivas en lugar de por técnicas aisladas. Una primitiva es una capacidad</a:t>
+            </a:r>
+          </a:p>
+          <a:p>
+            <a:pPr>
+              <a:spcAft>
+                <a:spcPts val="600"/>
+              </a:spcAft>
+            </a:pPr>
+            <a:r>
+              <a:rPr sz="1500">
+                <a:solidFill>
+                  <a:srgbClr val="22282E"/>
+                </a:solidFill>
+              </a:rPr>
+              <a:t>•  elemental que una vulnerabilidad concede: un info leak (leer memoria/una dirección), una</a:t>
+            </a:r>
+          </a:p>
+          <a:p>
+            <a:pPr>
+              <a:spcAft>
+                <a:spcPts val="600"/>
+              </a:spcAft>
+            </a:pPr>
+            <a:r>
+              <a:rPr sz="1500">
+                <a:solidFill>
+                  <a:srgbClr val="22282E"/>
+                </a:solidFill>
+              </a:rPr>
+              <a:t>•  escritura arbitraria (escribir un valor donde se quiera), un control de flujo (fijar RIP). El</a:t>
+            </a:r>
+          </a:p>
+          <a:p>
+            <a:pPr>
+              <a:spcAft>
+                <a:spcPts val="600"/>
+              </a:spcAft>
+            </a:pPr>
+            <a:r>
+              <a:rPr sz="1500">
+                <a:solidFill>
+                  <a:srgbClr val="22282E"/>
+                </a:solidFill>
+              </a:rPr>
+              <a:t>•  exploiting moderno consiste en encadenar primitivas para escalar desde "el programa crashea" hasta</a:t>
+            </a:r>
+          </a:p>
+          <a:p>
+            <a:pPr>
+              <a:spcAft>
+                <a:spcPts val="600"/>
+              </a:spcAft>
+            </a:pPr>
+            <a:r>
+              <a:rPr sz="1500">
+                <a:solidFill>
+                  <a:srgbClr val="22282E"/>
+                </a:solidFill>
+              </a:rPr>
+              <a:t>•  "ejecuto lo que quiero": primero conseguir un leak, con él derrotar ASLR, con las direcciones montar</a:t>
             </a:r>
           </a:p>
         </p:txBody>
@@ -4286,7 +4497,7 @@
                   <a:srgbClr val="0B3D2E"/>
                 </a:solidFill>
               </a:rPr>
-              <a:t>🧰 Herramientas y preparación</a:t>
+              <a:t>📖 Definiciones y características</a:t>
             </a:r>
           </a:p>
         </p:txBody>
@@ -4324,22 +4535,97 @@
                   <a:srgbClr val="22282E"/>
                 </a:solidFill>
               </a:rPr>
-              <a:t>•  pip install pwntools ROPgadget</a:t>
-            </a:r>
-          </a:p>
-          <a:p>
-            <a:pPr>
-              <a:spcAft>
-                <a:spcPts val="600"/>
-              </a:spcAft>
-            </a:pPr>
-            <a:r>
-              <a:rPr sz="1500">
-                <a:solidFill>
-                  <a:srgbClr val="22282E"/>
-                </a:solidFill>
-              </a:rPr>
-              <a:t>•  git clone https://github.com/niklasb/libc-database</a:t>
+              <a:t>•  Primitiva de explotación: capacidad atómica (leer, escribir, controlar flujo). Clave: los</a:t>
+            </a:r>
+          </a:p>
+          <a:p>
+            <a:pPr>
+              <a:spcAft>
+                <a:spcPts val="600"/>
+              </a:spcAft>
+            </a:pPr>
+            <a:r>
+              <a:rPr sz="1500">
+                <a:solidFill>
+                  <a:srgbClr val="22282E"/>
+                </a:solidFill>
+              </a:rPr>
+              <a:t>•  exploits se construyen encadenando primitivas.</a:t>
+            </a:r>
+          </a:p>
+          <a:p>
+            <a:pPr>
+              <a:spcAft>
+                <a:spcPts val="600"/>
+              </a:spcAft>
+            </a:pPr>
+            <a:r>
+              <a:rPr sz="1500">
+                <a:solidFill>
+                  <a:srgbClr val="22282E"/>
+                </a:solidFill>
+              </a:rPr>
+              <a:t>•  Info leak: filtra una dirección para derrotar ASLR/PIE. Clave: imprescindible en objetivos</a:t>
+            </a:r>
+          </a:p>
+          <a:p>
+            <a:pPr>
+              <a:spcAft>
+                <a:spcPts val="600"/>
+              </a:spcAft>
+            </a:pPr>
+            <a:r>
+              <a:rPr sz="1500">
+                <a:solidFill>
+                  <a:srgbClr val="22282E"/>
+                </a:solidFill>
+              </a:rPr>
+              <a:t>•  modernos.</a:t>
+            </a:r>
+          </a:p>
+          <a:p>
+            <a:pPr>
+              <a:spcAft>
+                <a:spcPts val="600"/>
+              </a:spcAft>
+            </a:pPr>
+            <a:r>
+              <a:rPr sz="1500">
+                <a:solidFill>
+                  <a:srgbClr val="22282E"/>
+                </a:solidFill>
+              </a:rPr>
+              <a:t>•  Cálculo de base dinámico: base = leak - offset. Clave: hace el exploit robusto entre corridas.</a:t>
+            </a:r>
+          </a:p>
+          <a:p>
+            <a:pPr>
+              <a:spcAft>
+                <a:spcPts val="600"/>
+              </a:spcAft>
+            </a:pPr>
+            <a:r>
+              <a:rPr sz="1500">
+                <a:solidFill>
+                  <a:srgbClr val="22282E"/>
+                </a:solidFill>
+              </a:rPr>
+              <a:t>•  ret2dlresolve: técnica que fuerza al enlazador dinámico a resolver un símbolo (p. ej. system)</a:t>
+            </a:r>
+          </a:p>
+          <a:p>
+            <a:pPr>
+              <a:spcAft>
+                <a:spcPts val="600"/>
+              </a:spcAft>
+            </a:pPr>
+            <a:r>
+              <a:rPr sz="1500">
+                <a:solidFill>
+                  <a:srgbClr val="22282E"/>
+                </a:solidFill>
+              </a:rPr>
+              <a:t>•  sin conocer libc. Clave: útil sin leak de libc.</a:t>
             </a:r>
           </a:p>
         </p:txBody>
@@ -4390,7 +4676,7 @@
                   <a:srgbClr val="0B3D2E"/>
                 </a:solidFill>
               </a:rPr>
-              <a:t>🧪 Laboratorio guiado</a:t>
+              <a:t>📔 Glosario</a:t>
             </a:r>
           </a:p>
         </p:txBody>
@@ -4428,97 +4714,97 @@
                   <a:srgbClr val="22282E"/>
                 </a:solidFill>
               </a:rPr>
-              <a:t>•  Reconocimiento del objetivo (binario de reto con NX+PIE+ASLR, sin canary o con canary a filtrar):</a:t>
-            </a:r>
-          </a:p>
-          <a:p>
-            <a:pPr>
-              <a:spcAft>
-                <a:spcPts val="600"/>
-              </a:spcAft>
-            </a:pPr>
-            <a:r>
-              <a:rPr sz="1500">
-                <a:solidFill>
-                  <a:srgbClr val="22282E"/>
-                </a:solidFill>
-              </a:rPr>
-              <a:t>•  checksec ./target</a:t>
-            </a:r>
-          </a:p>
-          <a:p>
-            <a:pPr>
-              <a:spcAft>
-                <a:spcPts val="600"/>
-              </a:spcAft>
-            </a:pPr>
-            <a:r>
-              <a:rPr sz="1500">
-                <a:solidFill>
-                  <a:srgbClr val="22282E"/>
-                </a:solidFill>
-              </a:rPr>
-              <a:t>•  Estructura el exploit en pwntools con una plantilla reutilizable:</a:t>
-            </a:r>
-          </a:p>
-          <a:p>
-            <a:pPr>
-              <a:spcAft>
-                <a:spcPts val="600"/>
-              </a:spcAft>
-            </a:pPr>
-            <a:r>
-              <a:rPr sz="1500">
-                <a:solidFill>
-                  <a:srgbClr val="22282E"/>
-                </a:solidFill>
-              </a:rPr>
-              <a:t>•  from pwn import</a:t>
-            </a:r>
-          </a:p>
-          <a:p>
-            <a:pPr>
-              <a:spcAft>
-                <a:spcPts val="600"/>
-              </a:spcAft>
-            </a:pPr>
-            <a:r>
-              <a:rPr sz="1500">
-                <a:solidFill>
-                  <a:srgbClr val="22282E"/>
-                </a:solidFill>
-              </a:rPr>
-              <a:t>•  exe = context.binary = ELF("./target")</a:t>
-            </a:r>
-          </a:p>
-          <a:p>
-            <a:pPr>
-              <a:spcAft>
-                <a:spcPts val="600"/>
-              </a:spcAft>
-            </a:pPr>
-            <a:r>
-              <a:rPr sz="1500">
-                <a:solidFill>
-                  <a:srgbClr val="22282E"/>
-                </a:solidFill>
-              </a:rPr>
-              <a:t>•  libc = ELF("./libc.so.6")</a:t>
-            </a:r>
-          </a:p>
-          <a:p>
-            <a:pPr>
-              <a:spcAft>
-                <a:spcPts val="600"/>
-              </a:spcAft>
-            </a:pPr>
-            <a:r>
-              <a:rPr sz="1500">
-                <a:solidFill>
-                  <a:srgbClr val="22282E"/>
-                </a:solidFill>
-              </a:rPr>
-              <a:t>•  def conn():</a:t>
+              <a:t>•  Término — Definición concisa</a:t>
+            </a:r>
+          </a:p>
+          <a:p>
+            <a:pPr>
+              <a:spcAft>
+                <a:spcPts val="600"/>
+              </a:spcAft>
+            </a:pPr>
+            <a:r>
+              <a:rPr sz="1500">
+                <a:solidFill>
+                  <a:srgbClr val="22282E"/>
+                </a:solidFill>
+              </a:rPr>
+              <a:t>•  Desarrollo de exploits — Convertir un crash en un exploit fiable</a:t>
+            </a:r>
+          </a:p>
+          <a:p>
+            <a:pPr>
+              <a:spcAft>
+                <a:spcPts val="600"/>
+              </a:spcAft>
+            </a:pPr>
+            <a:r>
+              <a:rPr sz="1500">
+                <a:solidFill>
+                  <a:srgbClr val="22282E"/>
+                </a:solidFill>
+              </a:rPr>
+              <a:t>•  Primitiva — Capacidad elemental que concede una vulnerabilidad</a:t>
+            </a:r>
+          </a:p>
+          <a:p>
+            <a:pPr>
+              <a:spcAft>
+                <a:spcPts val="600"/>
+              </a:spcAft>
+            </a:pPr>
+            <a:r>
+              <a:rPr sz="1500">
+                <a:solidFill>
+                  <a:srgbClr val="22282E"/>
+                </a:solidFill>
+              </a:rPr>
+              <a:t>•  Info leak — Primitiva que revela una dirección en ejecución</a:t>
+            </a:r>
+          </a:p>
+          <a:p>
+            <a:pPr>
+              <a:spcAft>
+                <a:spcPts val="600"/>
+              </a:spcAft>
+            </a:pPr>
+            <a:r>
+              <a:rPr sz="1500">
+                <a:solidFill>
+                  <a:srgbClr val="22282E"/>
+                </a:solidFill>
+              </a:rPr>
+              <a:t>•  Escritura arbitraria — Primitiva de escribir un valor donde se quiera</a:t>
+            </a:r>
+          </a:p>
+          <a:p>
+            <a:pPr>
+              <a:spcAft>
+                <a:spcPts val="600"/>
+              </a:spcAft>
+            </a:pPr>
+            <a:r>
+              <a:rPr sz="1500">
+                <a:solidFill>
+                  <a:srgbClr val="22282E"/>
+                </a:solidFill>
+              </a:rPr>
+              <a:t>•  Control de flujo — Primitiva de fijar RIP</a:t>
+            </a:r>
+          </a:p>
+          <a:p>
+            <a:pPr>
+              <a:spcAft>
+                <a:spcPts val="600"/>
+              </a:spcAft>
+            </a:pPr>
+            <a:r>
+              <a:rPr sz="1500">
+                <a:solidFill>
+                  <a:srgbClr val="22282E"/>
+                </a:solidFill>
+              </a:rPr>
+              <a:t>•  Encadenar primitivas — Combinar capacidades para escalar el exploit</a:t>
             </a:r>
           </a:p>
         </p:txBody>
@@ -4569,7 +4855,7 @@
                   <a:srgbClr val="0B3D2E"/>
                 </a:solidFill>
               </a:rPr>
-              <a:t>✍️ Ejercicios</a:t>
+              <a:t>🧪 Laboratorio guiado</a:t>
             </a:r>
           </a:p>
         </p:txBody>
@@ -4607,82 +4893,97 @@
                   <a:srgbClr val="22282E"/>
                 </a:solidFill>
               </a:rPr>
-              <a:t>•  Escribe una plantilla pwntools que alterne local/remoto con args.REMOTE.</a:t>
-            </a:r>
-          </a:p>
-          <a:p>
-            <a:pPr>
-              <a:spcAft>
-                <a:spcPts val="600"/>
-              </a:spcAft>
-            </a:pPr>
-            <a:r>
-              <a:rPr sz="1500">
-                <a:solidFill>
-                  <a:srgbClr val="22282E"/>
-                </a:solidFill>
-              </a:rPr>
-              <a:t>•  Identifica una libc desconocida a partir de un leak con libc-database.</a:t>
-            </a:r>
-          </a:p>
-          <a:p>
-            <a:pPr>
-              <a:spcAft>
-                <a:spcPts val="600"/>
-              </a:spcAft>
-            </a:pPr>
-            <a:r>
-              <a:rPr sz="1500">
-                <a:solidFill>
-                  <a:srgbClr val="22282E"/>
-                </a:solidFill>
-              </a:rPr>
-              <a:t>•  Añade filtrado de canary vía un leak previo.</a:t>
-            </a:r>
-          </a:p>
-          <a:p>
-            <a:pPr>
-              <a:spcAft>
-                <a:spcPts val="600"/>
-              </a:spcAft>
-            </a:pPr>
-            <a:r>
-              <a:rPr sz="1500">
-                <a:solidFill>
-                  <a:srgbClr val="22282E"/>
-                </a:solidFill>
-              </a:rPr>
-              <a:t>•  Sustituye system por un onegadget válido y verifica constraints.</a:t>
-            </a:r>
-          </a:p>
-          <a:p>
-            <a:pPr>
-              <a:spcAft>
-                <a:spcPts val="600"/>
-              </a:spcAft>
-            </a:pPr>
-            <a:r>
-              <a:rPr sz="1500">
-                <a:solidFill>
-                  <a:srgbClr val="22282E"/>
-                </a:solidFill>
-              </a:rPr>
-              <a:t>•  Implementa ret2dlresolve en un binario sin leak de libc.</a:t>
-            </a:r>
-          </a:p>
-          <a:p>
-            <a:pPr>
-              <a:spcAft>
-                <a:spcPts val="600"/>
-              </a:spcAft>
-            </a:pPr>
-            <a:r>
-              <a:rPr sz="1500">
-                <a:solidFill>
-                  <a:srgbClr val="22282E"/>
-                </a:solidFill>
-              </a:rPr>
-              <a:t>•  Añade lógica de reintento y mide la fiabilidad en 20 corridas.</a:t>
+              <a:t>•  Reconocimiento del objetivo (binario de reto con NX+PIE+ASLR, sin canary o con canary a filtrar):</a:t>
+            </a:r>
+          </a:p>
+          <a:p>
+            <a:pPr>
+              <a:spcAft>
+                <a:spcPts val="600"/>
+              </a:spcAft>
+            </a:pPr>
+            <a:r>
+              <a:rPr sz="1500">
+                <a:solidFill>
+                  <a:srgbClr val="22282E"/>
+                </a:solidFill>
+              </a:rPr>
+              <a:t>•  Estructura el exploit en pwntools con una plantilla reutilizable:</a:t>
+            </a:r>
+          </a:p>
+          <a:p>
+            <a:pPr>
+              <a:spcAft>
+                <a:spcPts val="600"/>
+              </a:spcAft>
+            </a:pPr>
+            <a:r>
+              <a:rPr sz="1500">
+                <a:solidFill>
+                  <a:srgbClr val="22282E"/>
+                </a:solidFill>
+              </a:rPr>
+              <a:t>•  Primitiva 1 — leak: usa la vulnerabilidad para filtrar una dirección de libc (GOT/stack) y</a:t>
+            </a:r>
+          </a:p>
+          <a:p>
+            <a:pPr>
+              <a:spcAft>
+                <a:spcPts val="600"/>
+              </a:spcAft>
+            </a:pPr>
+            <a:r>
+              <a:rPr sz="1500">
+                <a:solidFill>
+                  <a:srgbClr val="22282E"/>
+                </a:solidFill>
+              </a:rPr>
+              <a:t>•  calcula la base:</a:t>
+            </a:r>
+          </a:p>
+          <a:p>
+            <a:pPr>
+              <a:spcAft>
+                <a:spcPts val="600"/>
+              </a:spcAft>
+            </a:pPr>
+            <a:r>
+              <a:rPr sz="1500">
+                <a:solidFill>
+                  <a:srgbClr val="22282E"/>
+                </a:solidFill>
+              </a:rPr>
+              <a:t>•  Primitiva 2 — control de flujo: construye una cadena ROP con la base ya conocida para</a:t>
+            </a:r>
+          </a:p>
+          <a:p>
+            <a:pPr>
+              <a:spcAft>
+                <a:spcPts val="600"/>
+              </a:spcAft>
+            </a:pPr>
+            <a:r>
+              <a:rPr sz="1500">
+                <a:solidFill>
+                  <a:srgbClr val="22282E"/>
+                </a:solidFill>
+              </a:rPr>
+              <a:t>•  system("/bin/sh") o un onegadget, cuidando la alineación.</a:t>
+            </a:r>
+          </a:p>
+          <a:p>
+            <a:pPr>
+              <a:spcAft>
+                <a:spcPts val="600"/>
+              </a:spcAft>
+            </a:pPr>
+            <a:r>
+              <a:rPr sz="1500">
+                <a:solidFill>
+                  <a:srgbClr val="22282E"/>
+                </a:solidFill>
+              </a:rPr>
+              <a:t>•  Si el binario es PIE, filtra también su base y usa exe.address = codeleak - offset.</a:t>
             </a:r>
           </a:p>
         </p:txBody>
@@ -4733,7 +5034,7 @@
                   <a:srgbClr val="0B3D2E"/>
                 </a:solidFill>
               </a:rPr>
-              <a:t>📝 Reto verificable</a:t>
+              <a:t>✍️ Ejercicios</a:t>
             </a:r>
           </a:p>
         </p:txBody>
@@ -4771,52 +5072,82 @@
                   <a:srgbClr val="22282E"/>
                 </a:solidFill>
               </a:rPr>
-              <a:t>•  Desarrolla un exploit completo contra un binario de laboratorio con NX+ASLR (y PIE si te atreves) que</a:t>
-            </a:r>
-          </a:p>
-          <a:p>
-            <a:pPr>
-              <a:spcAft>
-                <a:spcPts val="600"/>
-              </a:spcAft>
-            </a:pPr>
-            <a:r>
-              <a:rPr sz="1500">
-                <a:solidFill>
-                  <a:srgbClr val="22282E"/>
-                </a:solidFill>
-              </a:rPr>
-              <a:t>•  obtenga shell filtrando la base de libc en runtime.</a:t>
-            </a:r>
-          </a:p>
-          <a:p>
-            <a:pPr>
-              <a:spcAft>
-                <a:spcPts val="600"/>
-              </a:spcAft>
-            </a:pPr>
-            <a:r>
-              <a:rPr sz="1500">
-                <a:solidFill>
-                  <a:srgbClr val="22282E"/>
-                </a:solidFill>
-              </a:rPr>
-              <a:t>•  Criterio de aceptación: ./exploit.py da shell interactiva de forma fiable (≥ 8/10 corridas) con</a:t>
-            </a:r>
-          </a:p>
-          <a:p>
-            <a:pPr>
-              <a:spcAft>
-                <a:spcPts val="600"/>
-              </a:spcAft>
-            </a:pPr>
-            <a:r>
-              <a:rPr sz="1500">
-                <a:solidFill>
-                  <a:srgbClr val="22282E"/>
-                </a:solidFill>
-              </a:rPr>
-              <a:t>•  ASLR activado, calculando la base dinámicamente.</a:t>
+              <a:t>•  Escribe una plantilla pwntools que alterne local/remoto con args.REMOTE.</a:t>
+            </a:r>
+          </a:p>
+          <a:p>
+            <a:pPr>
+              <a:spcAft>
+                <a:spcPts val="600"/>
+              </a:spcAft>
+            </a:pPr>
+            <a:r>
+              <a:rPr sz="1500">
+                <a:solidFill>
+                  <a:srgbClr val="22282E"/>
+                </a:solidFill>
+              </a:rPr>
+              <a:t>•  Identifica una libc desconocida a partir de un leak con libc-database.</a:t>
+            </a:r>
+          </a:p>
+          <a:p>
+            <a:pPr>
+              <a:spcAft>
+                <a:spcPts val="600"/>
+              </a:spcAft>
+            </a:pPr>
+            <a:r>
+              <a:rPr sz="1500">
+                <a:solidFill>
+                  <a:srgbClr val="22282E"/>
+                </a:solidFill>
+              </a:rPr>
+              <a:t>•  Añade filtrado de canary vía un leak previo.</a:t>
+            </a:r>
+          </a:p>
+          <a:p>
+            <a:pPr>
+              <a:spcAft>
+                <a:spcPts val="600"/>
+              </a:spcAft>
+            </a:pPr>
+            <a:r>
+              <a:rPr sz="1500">
+                <a:solidFill>
+                  <a:srgbClr val="22282E"/>
+                </a:solidFill>
+              </a:rPr>
+              <a:t>•  Sustituye system por un onegadget válido y verifica constraints.</a:t>
+            </a:r>
+          </a:p>
+          <a:p>
+            <a:pPr>
+              <a:spcAft>
+                <a:spcPts val="600"/>
+              </a:spcAft>
+            </a:pPr>
+            <a:r>
+              <a:rPr sz="1500">
+                <a:solidFill>
+                  <a:srgbClr val="22282E"/>
+                </a:solidFill>
+              </a:rPr>
+              <a:t>•  Implementa ret2dlresolve en un binario sin leak de libc.</a:t>
+            </a:r>
+          </a:p>
+          <a:p>
+            <a:pPr>
+              <a:spcAft>
+                <a:spcPts val="600"/>
+              </a:spcAft>
+            </a:pPr>
+            <a:r>
+              <a:rPr sz="1500">
+                <a:solidFill>
+                  <a:srgbClr val="22282E"/>
+                </a:solidFill>
+              </a:rPr>
+              <a:t>•  Añade lógica de reintento y mide la fiabilidad en 20 corridas.</a:t>
             </a:r>
           </a:p>
         </p:txBody>
